--- a/desflurane_critical_appraisal/output/desflurane_critical_appraisal_ja.pptx
+++ b/desflurane_critical_appraisal/output/desflurane_critical_appraisal_ja.pptx
@@ -3255,7 +3255,22 @@
               <a:defRPr sz="1800"/>
             </a:pPr>
             <a:r>
-              <a:t>デスフルラン特有の優位性なし</a:t>
+              <a:t>De Hert 2009 CABG 1年死亡率: D 6.9% vs S 3.3% vs TIVA 12.3%</a:t>
+            </a:r>
+          </a:p>
+          <a:p>
+            <a:pPr>
+              <a:spcAft>
+                <a:spcPts val="600"/>
+              </a:spcAft>
+              <a:defRPr sz="1800" b="1">
+                <a:solidFill>
+                  <a:srgbClr val="CC0000"/>
+                </a:solidFill>
+              </a:defRPr>
+            </a:pPr>
+            <a:r>
+              <a:t>→ デスフルランはセボフルランの約2倍の死亡率</a:t>
             </a:r>
           </a:p>
           <a:p>
@@ -3604,7 +3619,7 @@
               <a:defRPr sz="1800"/>
             </a:pPr>
             <a:r>
-              <a:t>7. 心臓手術 → クラス効果、差なし</a:t>
+              <a:t>7. 心臓手術 → クラス効果、CABG死亡率D6.9% vs S3.3%</a:t>
             </a:r>
           </a:p>
           <a:p>
@@ -3719,51 +3734,62 @@
               <a:defRPr sz="1800"/>
             </a:pPr>
             <a:r>
-              <a:t>2. 抜管時間を主要エンドポイントとし退院・転帰を軽視</a:t>
-            </a:r>
-          </a:p>
-          <a:p>
-            <a:pPr>
-              <a:spcAft>
-                <a:spcPts val="600"/>
-              </a:spcAft>
-              <a:defRPr sz="1800"/>
-            </a:pPr>
-            <a:r>
-              <a:t>3. FGF未報告またはハイフロー条件で差を人工的に拡大</a:t>
-            </a:r>
-          </a:p>
-          <a:p>
-            <a:pPr>
-              <a:spcAft>
-                <a:spcPts val="600"/>
-              </a:spcAft>
-              <a:defRPr sz="1800"/>
-            </a:pPr>
-            <a:r>
-              <a:t>4. BISモニタリングなしで麻酔深度が不均衡</a:t>
-            </a:r>
-          </a:p>
-          <a:p>
-            <a:pPr>
-              <a:spcAft>
-                <a:spcPts val="600"/>
-              </a:spcAft>
-              <a:defRPr sz="1800"/>
-            </a:pPr>
-            <a:r>
-              <a:t>5. 少数例、多重比較補正なし、ぎりぎりのp値</a:t>
-            </a:r>
-          </a:p>
-          <a:p>
-            <a:pPr>
-              <a:spcAft>
-                <a:spcPts val="600"/>
-              </a:spcAft>
-              <a:defRPr sz="1800"/>
-            </a:pPr>
-            <a:r>
-              <a:t>6. 利益相反の開示不十分</a:t>
+              <a:t>2. 主要エンドポイントの事前指定なし（6/10論文）</a:t>
+            </a:r>
+          </a:p>
+          <a:p>
+            <a:pPr>
+              <a:spcAft>
+                <a:spcPts val="600"/>
+              </a:spcAft>
+              <a:defRPr sz="1800"/>
+            </a:pPr>
+            <a:r>
+              <a:t>3. 多重比較補正の系統的欠如 → ぎりぎりのp値</a:t>
+            </a:r>
+          </a:p>
+          <a:p>
+            <a:pPr>
+              <a:spcAft>
+                <a:spcPts val="600"/>
+              </a:spcAft>
+              <a:defRPr sz="1800"/>
+            </a:pPr>
+            <a:r>
+              <a:t>4. 抜管時間を主要EPとし退院・転帰を軽視</a:t>
+            </a:r>
+          </a:p>
+          <a:p>
+            <a:pPr>
+              <a:spcAft>
+                <a:spcPts val="600"/>
+              </a:spcAft>
+              <a:defRPr sz="1800"/>
+            </a:pPr>
+            <a:r>
+              <a:t>5. FGF未報告またはハイフロー条件で差を人工的に拡大</a:t>
+            </a:r>
+          </a:p>
+          <a:p>
+            <a:pPr>
+              <a:spcAft>
+                <a:spcPts val="600"/>
+              </a:spcAft>
+              <a:defRPr sz="1800"/>
+            </a:pPr>
+            <a:r>
+              <a:t>6. BISモニタリングなしで麻酔深度が不均衡</a:t>
+            </a:r>
+          </a:p>
+          <a:p>
+            <a:pPr>
+              <a:spcAft>
+                <a:spcPts val="600"/>
+              </a:spcAft>
+              <a:defRPr sz="1800"/>
+            </a:pPr>
+            <a:r>
+              <a:t>7. 少数例、検出力不足、利益相反の開示不十分</a:t>
             </a:r>
           </a:p>
           <a:p>
